--- a/tests/fixtures/sample_twoslide.pptx
+++ b/tests/fixtures/sample_twoslide.pptx
@@ -3091,28 +3091,47 @@
       <p:grpSpPr/>
       <p:sp>
         <p:nvSpPr>
-          <p:cNvPr id="2" name="TextBox 1"/>
-          <p:cNvSpPr txBox="1"/>
-          <p:nvPr/>
-        </p:nvSpPr>
-        <p:spPr>
-          <a:xfrm>
-            <a:off x="914400" y="914400"/>
-            <a:ext cx="5486400" cy="914400"/>
-          </a:xfrm>
-          <a:prstGeom prst="rect">
-            <a:avLst/>
-          </a:prstGeom>
-          <a:noFill/>
-        </p:spPr>
-        <p:txBody>
-          <a:bodyPr wrap="none">
-            <a:spAutoFit/>
-          </a:bodyPr>
-          <a:lstStyle/>
-          <a:p>
-            <a:r>
-              <a:t>Slide one content</a:t>
+          <p:cNvPr id="2" name="Title 1"/>
+          <p:cNvSpPr>
+            <a:spLocks noGrp="1"/>
+          </p:cNvSpPr>
+          <p:nvPr>
+            <p:ph type="title"/>
+          </p:nvPr>
+        </p:nvSpPr>
+        <p:spPr/>
+        <p:txBody>
+          <a:bodyPr/>
+          <a:lstStyle/>
+          <a:p>
+            <a:r>
+              <a:t>Lorem Ipsum</a:t>
+            </a:r>
+          </a:p>
+        </p:txBody>
+      </p:sp>
+      <p:sp>
+        <p:nvSpPr>
+          <p:cNvPr id="3" name="Content Placeholder 2"/>
+          <p:cNvSpPr>
+            <a:spLocks noGrp="1"/>
+          </p:cNvSpPr>
+          <p:nvPr>
+            <p:ph idx="1"/>
+          </p:nvPr>
+        </p:nvSpPr>
+        <p:spPr/>
+        <p:txBody>
+          <a:bodyPr/>
+          <a:lstStyle/>
+          <a:p>
+            <a:r>
+              <a:t>Lorem ipsum dolor sit amet, consectetur adipiscing elit.</a:t>
+            </a:r>
+          </a:p>
+          <a:p>
+            <a:r>
+              <a:t>日本語の箇条書きサンプルです。</a:t>
             </a:r>
           </a:p>
         </p:txBody>
@@ -3137,28 +3156,47 @@
       <p:grpSpPr/>
       <p:sp>
         <p:nvSpPr>
-          <p:cNvPr id="2" name="TextBox 1"/>
-          <p:cNvSpPr txBox="1"/>
-          <p:nvPr/>
-        </p:nvSpPr>
-        <p:spPr>
-          <a:xfrm>
-            <a:off x="914400" y="914400"/>
-            <a:ext cx="5486400" cy="914400"/>
-          </a:xfrm>
-          <a:prstGeom prst="rect">
-            <a:avLst/>
-          </a:prstGeom>
-          <a:noFill/>
-        </p:spPr>
-        <p:txBody>
-          <a:bodyPr wrap="none">
-            <a:spAutoFit/>
-          </a:bodyPr>
-          <a:lstStyle/>
-          <a:p>
-            <a:r>
-              <a:t>Slide two content</a:t>
+          <p:cNvPr id="2" name="Title 1"/>
+          <p:cNvSpPr>
+            <a:spLocks noGrp="1"/>
+          </p:cNvSpPr>
+          <p:nvPr>
+            <p:ph type="title"/>
+          </p:nvPr>
+        </p:nvSpPr>
+        <p:spPr/>
+        <p:txBody>
+          <a:bodyPr/>
+          <a:lstStyle/>
+          <a:p>
+            <a:r>
+              <a:t>サンプルスライド</a:t>
+            </a:r>
+          </a:p>
+        </p:txBody>
+      </p:sp>
+      <p:sp>
+        <p:nvSpPr>
+          <p:cNvPr id="3" name="Content Placeholder 2"/>
+          <p:cNvSpPr>
+            <a:spLocks noGrp="1"/>
+          </p:cNvSpPr>
+          <p:nvPr>
+            <p:ph idx="1"/>
+          </p:nvPr>
+        </p:nvSpPr>
+        <p:spPr/>
+        <p:txBody>
+          <a:bodyPr/>
+          <a:lstStyle/>
+          <a:p>
+            <a:r>
+              <a:t>Sed do eiusmod tempor incididunt ut labore et dolore magna aliqua.</a:t>
+            </a:r>
+          </a:p>
+          <a:p>
+            <a:r>
+              <a:t>2行目の日本語テキストです。</a:t>
             </a:r>
           </a:p>
         </p:txBody>
